--- a/decks/combined-cells/combined-cells_ch4_specialised-cells.pptx
+++ b/decks/combined-cells/combined-cells_ch4_specialised-cells.pptx
@@ -126,30 +126,30 @@
   <p:extLst>
     <p:ext uri="{521415D9-36F7-43E2-AB2F-B90AF26B5E84}">
       <p14:sectionLst xmlns:p14="http://schemas.microsoft.com/office/powerpoint/2010/main">
-        <p14:section name="Opening" id="{65dcad62-915d-5b57-f73e-649b255b9480}">
+        <p14:section name="Opening" id="{4950e6b4-3e1a-93e8-01a9-59d3310b296d}">
           <p14:sldIdLst>
             <p14:sldId id="256"/>
           </p14:sldIdLst>
         </p14:section>
-        <p14:section name="Gate" id="{a54e15ac-a4aa-c8d7-9610-7bb437a6b206}">
+        <p14:section name="Gate" id="{aad2b662-f859-ef6c-81e1-772316fcba59}">
           <p14:sldIdLst>
             <p14:sldId id="257"/>
             <p14:sldId id="258"/>
           </p14:sldIdLst>
         </p14:section>
-        <p14:section name="Pre-teach" id="{ac12f20e-dc1b-8ead-0904-0cda4a9e1a93}">
+        <p14:section name="Pre-teach" id="{4ca0ff72-8b6e-577f-52e8-996b1135ab5c}">
           <p14:sldIdLst>
             <p14:sldId id="259"/>
             <p14:sldId id="260"/>
           </p14:sldIdLst>
         </p14:section>
-        <p14:section name="Read-along" id="{bc865fcf-9579-bedc-4caf-0779c4aea29a}">
+        <p14:section name="Read-along" id="{3875e998-bd29-1713-912a-3848c6e29661}">
           <p14:sldIdLst>
             <p14:sldId id="261"/>
             <p14:sldId id="262"/>
           </p14:sldIdLst>
         </p14:section>
-        <p14:section name="Teach" id="{8da8f60c-ee20-a859-664c-39fcbcda495d}">
+        <p14:section name="Teach" id="{fa957078-4ac7-893c-6463-a62bf34c7c6e}">
           <p14:sldIdLst>
             <p14:sldId id="263"/>
             <p14:sldId id="264"/>
@@ -158,7 +158,7 @@
             <p14:sldId id="267"/>
           </p14:sldIdLst>
         </p14:section>
-        <p14:section name="Routes" id="{177a5f15-f86b-b04d-b7ca-1f91d6f23757}">
+        <p14:section name="Routes" id="{691a63b3-7132-4963-57e1-48a96ffc7385}">
           <p14:sldIdLst>
             <p14:sldId id="268"/>
             <p14:sldId id="269"/>
@@ -166,12 +166,12 @@
             <p14:sldId id="271"/>
           </p14:sldIdLst>
         </p14:section>
-        <p14:section name="Close" id="{3467c1e1-d660-9668-d765-eac4187ca8d4}">
+        <p14:section name="Close" id="{6ddcc539-6d5f-bdf6-8b0c-3f5cf82b13ee}">
           <p14:sldIdLst>
             <p14:sldId id="272"/>
           </p14:sldIdLst>
         </p14:section>
-        <p14:section name="Answers" id="{db3e7ec2-ee86-9e34-ad64-e6cd078c46a2}">
+        <p14:section name="Answers" id="{c947aa7a-40a3-331f-31f2-cb0dca7526ac}">
           <p14:sldIdLst>
             <p14:sldId id="273"/>
             <p14:sldId id="274"/>
@@ -1327,7 +1327,7 @@
               <a:rPr lang="en-US" dirty="0"/>
               <a:t>Exit ticket — individual, silent, on a slip or mini-whiteboard. Recall before help: no notes, no lanes, no hints. Collect before pupils leave.
 Question: What is a specialised cell?
-Answer: D   a cell with adaptations that suit it to a particular job. A specialised cell is adapted, in shape, size and organelles, to carry out one particular function.
+Answer: C   a cell with adaptations that suit it to a particular job. A specialised cell is adapted, in shape, size and organelles, to carry out one particular function.
 Source of this question: gate item 1 re-asked (options rotated) — this chapter has no third quick-check module.
 The ebook also holds task 3, "Explain the root hair cell", for homework or the next lesson's do now.
 Sort the slips: correct → ready to move on; incorrect → start next lesson in the pre-teach group, with the read-along and the Support lane. Same destination next time.</a:t>
@@ -1510,7 +1510,7 @@
             <a:r>
               <a:rPr lang="en-US" dirty="0"/>
               <a:t>Answers — task 2: Reading the mitochondria. Reveal the answer; pupils mark their own work in a different colour, then read the "why" together. Same destination for every lane, so one answer serves the whole class.
-Answer: A   It needs a lot of energy, transferred by respiration
+Answer: D   It needs a lot of energy, transferred by respiration
 Why: Mitochondria release energy by respiration; many of them means the cell's job needs a lot of energy.
 Ask a Support pupil to explain one step, and a Stretch pupil to share their extension.</a:t>
             </a:r>
@@ -1601,9 +1601,9 @@
             <a:r>
               <a:rPr lang="en-US" dirty="0"/>
               <a:t>Do now — retrieval. Silent, no notes, no help: recall comes before any support. Give about four minutes.
-1. What is a specialised cell?  →  A   a cell with adaptations that suit it to a particular job
+1. What is a specialised cell?  →  D   a cell with adaptations that suit it to a particular job
 2. A sperm cell has a ___ so that it can swim to the egg.  →  tail
-3. What do xylem cells carry?  →  A   water and dissolved mineral ions from the roots to the leaves
+3. What do xylem cells carry?  →  C   water and dissolved mineral ions from the roots to the leaves
 Circulate: who gets 3/3 (Stretch route), 2/3 (Core), 0–1 (Support)? Use this to route pupils later in the lesson.</a:t>
             </a:r>
             <a:endParaRPr lang="en-US" dirty="0"/>
@@ -1693,7 +1693,7 @@
             <a:r>
               <a:rPr lang="en-US" dirty="0"/>
               <a:t>Answers — exit ticket: Exit ticket. Reveal the answer; pupils mark their own work in a different colour, then read the "why" together. Same destination for every lane, so one answer serves the whole class.
-Answer: D   a cell with adaptations that suit it to a particular job
+Answer: C   a cell with adaptations that suit it to a particular job
 Why: A specialised cell is adapted, in shape, size and organelles, to carry out one particular function.
 Ask a Support pupil to explain one step, and a Stretch pupil to share their extension.</a:t>
             </a:r>
@@ -1784,9 +1784,9 @@
             <a:r>
               <a:rPr lang="en-US" dirty="0"/>
               <a:t>Answers — pupils mark their own in a different colour, then hands up for 3/3, 2/3, 1/3.
-1. A   a cell with adaptations that suit it to a particular job. A specialised cell is adapted, in shape, size and organelles, to carry out one particular function.
+1. D   a cell with adaptations that suit it to a particular job. A specialised cell is adapted, in shape, size and organelles, to carry out one particular function.
 2. tail. The sperm's long tail beats to move the cell towards the egg; its mitochondria release the energy for this.
-3. A   water and dissolved mineral ions from the roots to the leaves. Xylem forms hollow tubes of dead cells, strengthened with lignin, that carry water and mineral ions upwards from the roots.
+3. C   water and dissolved mineral ions from the roots to the leaves. Xylem forms hollow tubes of dead cells, strengthened with lignin, that carry water and mineral ions upwards from the roots.
 Say the route each score points to: 3/3 Stretch, 2/3 Core, 0–1 Support. Pupils may choose to move up.</a:t>
             </a:r>
             <a:endParaRPr lang="en-US" dirty="0"/>
@@ -8891,7 +8891,7 @@
                 <a:ea typeface="Calibri" pitchFamily="34" charset="-122"/>
                 <a:cs typeface="Calibri" pitchFamily="34" charset="-120"/>
               </a:rPr>
-              <a:t>It needs a lot of energy, transferred by respiration</a:t>
+              <a:t>It makes a lot of protein</a:t>
             </a:r>
             <a:endParaRPr lang="en-US" sz="2600" dirty="0"/>
           </a:p>
@@ -8928,7 +8928,7 @@
                 <a:ea typeface="Calibri" pitchFamily="34" charset="-122"/>
                 <a:cs typeface="Calibri" pitchFamily="34" charset="-120"/>
               </a:rPr>
-              <a:t>It makes a lot of protein</a:t>
+              <a:t>It needs to absorb a lot of light</a:t>
             </a:r>
             <a:endParaRPr lang="en-US" sz="2600" dirty="0"/>
           </a:p>
@@ -9002,7 +9002,7 @@
                 <a:ea typeface="Calibri" pitchFamily="34" charset="-122"/>
                 <a:cs typeface="Calibri" pitchFamily="34" charset="-120"/>
               </a:rPr>
-              <a:t>It needs to absorb a lot of light</a:t>
+              <a:t>It needs a lot of energy, transferred by respiration</a:t>
             </a:r>
             <a:endParaRPr lang="en-US" sz="2600" dirty="0"/>
           </a:p>
@@ -10369,7 +10369,7 @@
                 <a:ea typeface="Calibri" pitchFamily="34" charset="-122"/>
                 <a:cs typeface="Calibri" pitchFamily="34" charset="-120"/>
               </a:rPr>
-              <a:t>a cell that has no nucleus</a:t>
+              <a:t>a cell that is larger than other cells</a:t>
             </a:r>
             <a:endParaRPr lang="en-US" sz="2400" dirty="0"/>
           </a:p>
@@ -10406,7 +10406,7 @@
                 <a:ea typeface="Calibri" pitchFamily="34" charset="-122"/>
                 <a:cs typeface="Calibri" pitchFamily="34" charset="-120"/>
               </a:rPr>
-              <a:t>a cell that is larger than other cells</a:t>
+              <a:t>a cell found only in plants</a:t>
             </a:r>
             <a:endParaRPr lang="en-US" sz="2400" dirty="0"/>
           </a:p>
@@ -10443,7 +10443,7 @@
                 <a:ea typeface="Calibri" pitchFamily="34" charset="-122"/>
                 <a:cs typeface="Calibri" pitchFamily="34" charset="-120"/>
               </a:rPr>
-              <a:t>a cell found only in plants</a:t>
+              <a:t>a cell with adaptations that suit it to a particular job</a:t>
             </a:r>
             <a:endParaRPr lang="en-US" sz="2400" dirty="0"/>
           </a:p>
@@ -10480,7 +10480,7 @@
                 <a:ea typeface="Calibri" pitchFamily="34" charset="-122"/>
                 <a:cs typeface="Calibri" pitchFamily="34" charset="-120"/>
               </a:rPr>
-              <a:t>a cell with adaptations that suit it to a particular job</a:t>
+              <a:t>a cell that has no nucleus</a:t>
             </a:r>
             <a:endParaRPr lang="en-US" sz="2400" dirty="0"/>
           </a:p>
@@ -11492,7 +11492,7 @@
                 <a:ea typeface="Cambria" pitchFamily="34" charset="-122"/>
                 <a:cs typeface="Cambria" pitchFamily="34" charset="-120"/>
               </a:rPr>
-              <a:t>A   It needs a lot of energy, transferred by respiration</a:t>
+              <a:t>D   It needs a lot of energy, transferred by respiration</a:t>
             </a:r>
             <a:endParaRPr lang="en-US" sz="1800" dirty="0"/>
           </a:p>
@@ -12026,7 +12026,7 @@
                 <a:ea typeface="Calibri" pitchFamily="34" charset="-122"/>
                 <a:cs typeface="Calibri" pitchFamily="34" charset="-120"/>
               </a:rPr>
-              <a:t>a cell with adaptations that suit it to a particular job</a:t>
+              <a:t>a cell that has no nucleus</a:t>
             </a:r>
             <a:endParaRPr lang="en-US" sz="2000" dirty="0"/>
           </a:p>
@@ -12063,7 +12063,7 @@
                 <a:ea typeface="Calibri" pitchFamily="34" charset="-122"/>
                 <a:cs typeface="Calibri" pitchFamily="34" charset="-120"/>
               </a:rPr>
-              <a:t>a cell that has no nucleus</a:t>
+              <a:t>a cell that is larger than other cells</a:t>
             </a:r>
             <a:endParaRPr lang="en-US" sz="2000" dirty="0"/>
           </a:p>
@@ -12100,7 +12100,7 @@
                 <a:ea typeface="Calibri" pitchFamily="34" charset="-122"/>
                 <a:cs typeface="Calibri" pitchFamily="34" charset="-120"/>
               </a:rPr>
-              <a:t>a cell that is larger than other cells</a:t>
+              <a:t>a cell found only in plants</a:t>
             </a:r>
             <a:endParaRPr lang="en-US" sz="2000" dirty="0"/>
           </a:p>
@@ -12137,7 +12137,7 @@
                 <a:ea typeface="Calibri" pitchFamily="34" charset="-122"/>
                 <a:cs typeface="Calibri" pitchFamily="34" charset="-120"/>
               </a:rPr>
-              <a:t>a cell found only in plants</a:t>
+              <a:t>a cell with adaptations that suit it to a particular job</a:t>
             </a:r>
             <a:endParaRPr lang="en-US" sz="2000" dirty="0"/>
           </a:p>
@@ -12539,7 +12539,7 @@
                 <a:ea typeface="Calibri" pitchFamily="34" charset="-122"/>
                 <a:cs typeface="Calibri" pitchFamily="34" charset="-120"/>
               </a:rPr>
-              <a:t>water and dissolved mineral ions from the roots to the leaves</a:t>
+              <a:t>oxygen from the leaves to the roots</a:t>
             </a:r>
             <a:endParaRPr lang="en-US" sz="1800" dirty="0"/>
           </a:p>
@@ -12613,7 +12613,7 @@
                 <a:ea typeface="Calibri" pitchFamily="34" charset="-122"/>
                 <a:cs typeface="Calibri" pitchFamily="34" charset="-120"/>
               </a:rPr>
-              <a:t>oxygen from the leaves to the roots</a:t>
+              <a:t>water and dissolved mineral ions from the roots to the leaves</a:t>
             </a:r>
             <a:endParaRPr lang="en-US" sz="1800" dirty="0"/>
           </a:p>
@@ -12989,7 +12989,7 @@
                 <a:ea typeface="Cambria" pitchFamily="34" charset="-122"/>
                 <a:cs typeface="Cambria" pitchFamily="34" charset="-120"/>
               </a:rPr>
-              <a:t>D   a cell with adaptations that suit it to a particular job</a:t>
+              <a:t>C   a cell with adaptations that suit it to a particular job</a:t>
             </a:r>
             <a:endParaRPr lang="en-US" sz="1800" dirty="0"/>
           </a:p>
@@ -13510,7 +13510,7 @@
                 <a:ea typeface="Calibri" pitchFamily="34" charset="-122"/>
                 <a:cs typeface="Calibri" pitchFamily="34" charset="-120"/>
               </a:rPr>
-              <a:t>A   a cell with adaptations that suit it to a particular job</a:t>
+              <a:t>D   a cell with adaptations that suit it to a particular job</a:t>
             </a:r>
             <a:endParaRPr lang="en-US" sz="2200" dirty="0"/>
           </a:p>
@@ -14010,7 +14010,7 @@
                 <a:ea typeface="Calibri" pitchFamily="34" charset="-122"/>
                 <a:cs typeface="Calibri" pitchFamily="34" charset="-120"/>
               </a:rPr>
-              <a:t>A   water and dissolved mineral ions from the roots to the leaves</a:t>
+              <a:t>C   water and dissolved mineral ions from the roots to the leaves</a:t>
             </a:r>
             <a:endParaRPr lang="en-US" sz="2200" dirty="0"/>
           </a:p>

--- a/decks/combined-cells/combined-cells_ch4_specialised-cells.pptx
+++ b/decks/combined-cells/combined-cells_ch4_specialised-cells.pptx
@@ -126,30 +126,30 @@
   <p:extLst>
     <p:ext uri="{521415D9-36F7-43E2-AB2F-B90AF26B5E84}">
       <p14:sectionLst xmlns:p14="http://schemas.microsoft.com/office/powerpoint/2010/main">
-        <p14:section name="Opening" id="{4950e6b4-3e1a-93e8-01a9-59d3310b296d}">
+        <p14:section name="Opening" id="{581fbf36-cc9a-8520-6d3b-a80e70c2070f}">
           <p14:sldIdLst>
             <p14:sldId id="256"/>
           </p14:sldIdLst>
         </p14:section>
-        <p14:section name="Gate" id="{aad2b662-f859-ef6c-81e1-772316fcba59}">
+        <p14:section name="Gate" id="{34ed96cb-0f08-ea61-4090-67ea0cdf64b6}">
           <p14:sldIdLst>
             <p14:sldId id="257"/>
             <p14:sldId id="258"/>
           </p14:sldIdLst>
         </p14:section>
-        <p14:section name="Pre-teach" id="{4ca0ff72-8b6e-577f-52e8-996b1135ab5c}">
+        <p14:section name="Pre-teach" id="{9d8b02b9-1b4c-df66-155d-51e549e8368f}">
           <p14:sldIdLst>
             <p14:sldId id="259"/>
             <p14:sldId id="260"/>
           </p14:sldIdLst>
         </p14:section>
-        <p14:section name="Read-along" id="{3875e998-bd29-1713-912a-3848c6e29661}">
+        <p14:section name="Read-along" id="{4130cdec-acc5-e403-a6d6-0d857c15ca5d}">
           <p14:sldIdLst>
             <p14:sldId id="261"/>
             <p14:sldId id="262"/>
           </p14:sldIdLst>
         </p14:section>
-        <p14:section name="Teach" id="{fa957078-4ac7-893c-6463-a62bf34c7c6e}">
+        <p14:section name="Teach" id="{74ddd048-34e9-ef91-2a4d-edd5ebf0f1e4}">
           <p14:sldIdLst>
             <p14:sldId id="263"/>
             <p14:sldId id="264"/>
@@ -158,7 +158,7 @@
             <p14:sldId id="267"/>
           </p14:sldIdLst>
         </p14:section>
-        <p14:section name="Routes" id="{691a63b3-7132-4963-57e1-48a96ffc7385}">
+        <p14:section name="Routes" id="{4eb01aba-7a41-b93e-75d1-e55dc71a6b28}">
           <p14:sldIdLst>
             <p14:sldId id="268"/>
             <p14:sldId id="269"/>
@@ -166,12 +166,12 @@
             <p14:sldId id="271"/>
           </p14:sldIdLst>
         </p14:section>
-        <p14:section name="Close" id="{6ddcc539-6d5f-bdf6-8b0c-3f5cf82b13ee}">
+        <p14:section name="Close" id="{1f62abe0-bd12-d438-7111-ff1830d843a0}">
           <p14:sldIdLst>
             <p14:sldId id="272"/>
           </p14:sldIdLst>
         </p14:section>
-        <p14:section name="Answers" id="{c947aa7a-40a3-331f-31f2-cb0dca7526ac}">
+        <p14:section name="Answers" id="{ed1d8486-5a4e-1928-9207-eccf705dd5fb}">
           <p14:sldIdLst>
             <p14:sldId id="273"/>
             <p14:sldId id="274"/>
